--- a/site/clases/parte-3-estadistica-inferencial/187-diseno-experimental/clase-187-diseno-experimental-presentacion.pptx
+++ b/site/clases/parte-3-estadistica-inferencial/187-diseno-experimental/clase-187-diseno-experimental-presentacion.pptx
@@ -3272,7 +3272,7 @@
                 </a:solidFill>
                 <a:latin typeface="Segoe UI"/>
               </a:rPr>
-              <a:t>Parte: 3 — Estadística Inferencial y Causal · Fuente: Montgomery, Design and Analysis of Experiments (8ª ed.) + Kohavi, Tang &amp; Xu (cap. 4-5).  Duración estimada: 80 min.</a:t>
+              <a:t>Parte: 3 — Estadística Inferencial y Causal · Fuente: Montgomery, Design and Analysis of Experiments (8ª ed.) + Kohavi, Tang &amp; Xu (cap. 4-5).  Duración estimada: 80 min. · Nivel: Avanzado</a:t>
             </a:r>
           </a:p>
         </p:txBody>
@@ -3581,7 +3581,7 @@
                 </a:solidFill>
                 <a:latin typeface="Segoe UI"/>
               </a:rPr>
-              <a:t>Parte: 3 — Estadística Inferencial y Causal · Fuente: Montgomery, Design and Analysis of Experiments (8ª ed.) + Kohavi, Tang &amp; Xu (cap. 4-5).  Duración estimada: 80 min.</a:t>
+              <a:t>Parte: 3 — Estadística Inferencial y Causal · Fuente: Montgomery, Design and Analysis of Experiments (8ª ed.) + Kohavi, Tang &amp; Xu (cap. 4-5).  Duración estimada: 80 min. · Nivel: Avanzado</a:t>
             </a:r>
           </a:p>
         </p:txBody>
@@ -4845,7 +4845,7 @@
                 </a:solidFill>
                 <a:latin typeface="Segoe UI"/>
               </a:rPr>
-              <a:t>Primer bloque ejecutable del notebook.</a:t>
+              <a:t>Testeamos dos factores a la vez y recuperamos efectos principales + interacción con un OLS y ~ A*B.</a:t>
             </a:r>
           </a:p>
         </p:txBody>
@@ -4932,7 +4932,387 @@
                 </a:solidFill>
                 <a:latin typeface="Courier New"/>
               </a:rPr>
-              <a:t># Imports y configuración inicial</a:t>
+              <a:t>import itertools</a:t>
+            </a:r>
+          </a:p>
+          <a:p>
+            <a:pPr>
+              <a:defRPr sz="1200" b="0">
+                <a:solidFill>
+                  <a:srgbClr val="F8FAFC"/>
+                </a:solidFill>
+                <a:latin typeface="Courier New"/>
+              </a:defRPr>
+            </a:pPr>
+            <a:r>
+              <a:rPr sz="1200" b="0">
+                <a:solidFill>
+                  <a:srgbClr val="F8FAFC"/>
+                </a:solidFill>
+                <a:latin typeface="Courier New"/>
+              </a:rPr>
+              <a:t>import numpy as np</a:t>
+            </a:r>
+          </a:p>
+          <a:p>
+            <a:pPr>
+              <a:defRPr sz="1200" b="0">
+                <a:solidFill>
+                  <a:srgbClr val="F8FAFC"/>
+                </a:solidFill>
+                <a:latin typeface="Courier New"/>
+              </a:defRPr>
+            </a:pPr>
+            <a:r>
+              <a:rPr sz="1200" b="0">
+                <a:solidFill>
+                  <a:srgbClr val="F8FAFC"/>
+                </a:solidFill>
+                <a:latin typeface="Courier New"/>
+              </a:rPr>
+              <a:t>import pandas as pd</a:t>
+            </a:r>
+          </a:p>
+          <a:p>
+            <a:pPr>
+              <a:defRPr sz="1200" b="0">
+                <a:solidFill>
+                  <a:srgbClr val="F8FAFC"/>
+                </a:solidFill>
+                <a:latin typeface="Courier New"/>
+              </a:defRPr>
+            </a:pPr>
+            <a:r>
+              <a:rPr sz="1200" b="0">
+                <a:solidFill>
+                  <a:srgbClr val="F8FAFC"/>
+                </a:solidFill>
+                <a:latin typeface="Courier New"/>
+              </a:rPr>
+              <a:t>from scipy import stats</a:t>
+            </a:r>
+          </a:p>
+          <a:p>
+            <a:pPr>
+              <a:defRPr sz="1200" b="0">
+                <a:solidFill>
+                  <a:srgbClr val="F8FAFC"/>
+                </a:solidFill>
+                <a:latin typeface="Courier New"/>
+              </a:defRPr>
+            </a:pPr>
+            <a:r>
+              <a:rPr sz="1200" b="0">
+                <a:solidFill>
+                  <a:srgbClr val="F8FAFC"/>
+                </a:solidFill>
+                <a:latin typeface="Courier New"/>
+              </a:rPr>
+              <a:t>import statsmodels.formula.api as smf</a:t>
+            </a:r>
+          </a:p>
+          <a:p>
+            <a:pPr>
+              <a:defRPr sz="1200" b="0">
+                <a:solidFill>
+                  <a:srgbClr val="F8FAFC"/>
+                </a:solidFill>
+                <a:latin typeface="Courier New"/>
+              </a:defRPr>
+            </a:pPr>
+            <a:r>
+              <a:rPr sz="1200" b="0">
+                <a:solidFill>
+                  <a:srgbClr val="F8FAFC"/>
+                </a:solidFill>
+                <a:latin typeface="Courier New"/>
+              </a:rPr>
+              <a:t>import matplotlib.pyplot as plt</a:t>
+            </a:r>
+          </a:p>
+          <a:p>
+            <a:pPr>
+              <a:defRPr sz="1200" b="0">
+                <a:solidFill>
+                  <a:srgbClr val="F8FAFC"/>
+                </a:solidFill>
+                <a:latin typeface="Courier New"/>
+              </a:defRPr>
+            </a:pPr>
+            <a:r>
+              <a:rPr sz="1200" b="0">
+                <a:solidFill>
+                  <a:srgbClr val="F8FAFC"/>
+                </a:solidFill>
+                <a:latin typeface="Courier New"/>
+              </a:rPr>
+              <a:t> </a:t>
+            </a:r>
+          </a:p>
+          <a:p>
+            <a:pPr>
+              <a:defRPr sz="1200" b="0">
+                <a:solidFill>
+                  <a:srgbClr val="F8FAFC"/>
+                </a:solidFill>
+                <a:latin typeface="Courier New"/>
+              </a:defRPr>
+            </a:pPr>
+            <a:r>
+              <a:rPr sz="1200" b="0">
+                <a:solidFill>
+                  <a:srgbClr val="F8FAFC"/>
+                </a:solidFill>
+                <a:latin typeface="Courier New"/>
+              </a:rPr>
+              <a:t>rng = np.random.default_rng(42)</a:t>
+            </a:r>
+          </a:p>
+          <a:p>
+            <a:pPr>
+              <a:defRPr sz="1200" b="0">
+                <a:solidFill>
+                  <a:srgbClr val="F8FAFC"/>
+                </a:solidFill>
+                <a:latin typeface="Courier New"/>
+              </a:defRPr>
+            </a:pPr>
+            <a:r>
+              <a:rPr sz="1200" b="0">
+                <a:solidFill>
+                  <a:srgbClr val="F8FAFC"/>
+                </a:solidFill>
+                <a:latin typeface="Courier New"/>
+              </a:rPr>
+              <a:t> </a:t>
+            </a:r>
+          </a:p>
+          <a:p>
+            <a:pPr>
+              <a:defRPr sz="1200" b="0">
+                <a:solidFill>
+                  <a:srgbClr val="F8FAFC"/>
+                </a:solidFill>
+                <a:latin typeface="Courier New"/>
+              </a:defRPr>
+            </a:pPr>
+            <a:r>
+              <a:rPr sz="1200" b="0">
+                <a:solidFill>
+                  <a:srgbClr val="F8FAFC"/>
+                </a:solidFill>
+                <a:latin typeface="Courier New"/>
+              </a:rPr>
+              <a:t>nper = 1000</a:t>
+            </a:r>
+          </a:p>
+          <a:p>
+            <a:pPr>
+              <a:defRPr sz="1200" b="0">
+                <a:solidFill>
+                  <a:srgbClr val="F8FAFC"/>
+                </a:solidFill>
+                <a:latin typeface="Courier New"/>
+              </a:defRPr>
+            </a:pPr>
+            <a:r>
+              <a:rPr sz="1200" b="0">
+                <a:solidFill>
+                  <a:srgbClr val="F8FAFC"/>
+                </a:solidFill>
+                <a:latin typeface="Courier New"/>
+              </a:rPr>
+              <a:t>rows = []</a:t>
+            </a:r>
+          </a:p>
+          <a:p>
+            <a:pPr>
+              <a:defRPr sz="1200" b="0">
+                <a:solidFill>
+                  <a:srgbClr val="F8FAFC"/>
+                </a:solidFill>
+                <a:latin typeface="Courier New"/>
+              </a:defRPr>
+            </a:pPr>
+            <a:r>
+              <a:rPr sz="1200" b="0">
+                <a:solidFill>
+                  <a:srgbClr val="F8FAFC"/>
+                </a:solidFill>
+                <a:latin typeface="Courier New"/>
+              </a:rPr>
+              <a:t>for A in (0, 1):</a:t>
+            </a:r>
+          </a:p>
+          <a:p>
+            <a:pPr>
+              <a:defRPr sz="1200" b="0">
+                <a:solidFill>
+                  <a:srgbClr val="F8FAFC"/>
+                </a:solidFill>
+                <a:latin typeface="Courier New"/>
+              </a:defRPr>
+            </a:pPr>
+            <a:r>
+              <a:rPr sz="1200" b="0">
+                <a:solidFill>
+                  <a:srgbClr val="F8FAFC"/>
+                </a:solidFill>
+                <a:latin typeface="Courier New"/>
+              </a:rPr>
+              <a:t>    for Bf in (0, 1):</a:t>
+            </a:r>
+          </a:p>
+          <a:p>
+            <a:pPr>
+              <a:defRPr sz="1200" b="0">
+                <a:solidFill>
+                  <a:srgbClr val="F8FAFC"/>
+                </a:solidFill>
+                <a:latin typeface="Courier New"/>
+              </a:defRPr>
+            </a:pPr>
+            <a:r>
+              <a:rPr sz="1200" b="0">
+                <a:solidFill>
+                  <a:srgbClr val="F8FAFC"/>
+                </a:solidFill>
+                <a:latin typeface="Courier New"/>
+              </a:rPr>
+              <a:t>        ctr = 0.10 + 0.02*A + 0.015*Bf + 0.02*A*Bf + rng.normal(0, 0.05, nper)</a:t>
+            </a:r>
+          </a:p>
+          <a:p>
+            <a:pPr>
+              <a:defRPr sz="1200" b="0">
+                <a:solidFill>
+                  <a:srgbClr val="F8FAFC"/>
+                </a:solidFill>
+                <a:latin typeface="Courier New"/>
+              </a:defRPr>
+            </a:pPr>
+            <a:r>
+              <a:rPr sz="1200" b="0">
+                <a:solidFill>
+                  <a:srgbClr val="F8FAFC"/>
+                </a:solidFill>
+                <a:latin typeface="Courier New"/>
+              </a:rPr>
+              <a:t>        for v in ctr:</a:t>
+            </a:r>
+          </a:p>
+          <a:p>
+            <a:pPr>
+              <a:defRPr sz="1200" b="0">
+                <a:solidFill>
+                  <a:srgbClr val="F8FAFC"/>
+                </a:solidFill>
+                <a:latin typeface="Courier New"/>
+              </a:defRPr>
+            </a:pPr>
+            <a:r>
+              <a:rPr sz="1200" b="0">
+                <a:solidFill>
+                  <a:srgbClr val="F8FAFC"/>
+                </a:solidFill>
+                <a:latin typeface="Courier New"/>
+              </a:rPr>
+              <a:t>            rows.append((A, Bf, v))</a:t>
+            </a:r>
+          </a:p>
+          <a:p>
+            <a:pPr>
+              <a:defRPr sz="1200" b="0">
+                <a:solidFill>
+                  <a:srgbClr val="F8FAFC"/>
+                </a:solidFill>
+                <a:latin typeface="Courier New"/>
+              </a:defRPr>
+            </a:pPr>
+            <a:r>
+              <a:rPr sz="1200" b="0">
+                <a:solidFill>
+                  <a:srgbClr val="F8FAFC"/>
+                </a:solidFill>
+                <a:latin typeface="Courier New"/>
+              </a:rPr>
+              <a:t>df = pd.DataFrame(rows, columns=["A", "B", "ctr"])</a:t>
+            </a:r>
+          </a:p>
+          <a:p>
+            <a:pPr>
+              <a:defRPr sz="1200" b="0">
+                <a:solidFill>
+                  <a:srgbClr val="F8FAFC"/>
+                </a:solidFill>
+                <a:latin typeface="Courier New"/>
+              </a:defRPr>
+            </a:pPr>
+            <a:r>
+              <a:rPr sz="1200" b="0">
+                <a:solidFill>
+                  <a:srgbClr val="F8FAFC"/>
+                </a:solidFill>
+                <a:latin typeface="Courier New"/>
+              </a:rPr>
+              <a:t>m = smf.ols("ctr ~ A * B", data=df).fit()</a:t>
+            </a:r>
+          </a:p>
+          <a:p>
+            <a:pPr>
+              <a:defRPr sz="1200" b="0">
+                <a:solidFill>
+                  <a:srgbClr val="F8FAFC"/>
+                </a:solidFill>
+                <a:latin typeface="Courier New"/>
+              </a:defRPr>
+            </a:pPr>
+            <a:r>
+              <a:rPr sz="1200" b="0">
+                <a:solidFill>
+                  <a:srgbClr val="F8FAFC"/>
+                </a:solidFill>
+                <a:latin typeface="Courier New"/>
+              </a:rPr>
+              <a:t>print(m.params.round(4))</a:t>
+            </a:r>
+          </a:p>
+          <a:p>
+            <a:pPr>
+              <a:defRPr sz="1200" b="0">
+                <a:solidFill>
+                  <a:srgbClr val="F8FAFC"/>
+                </a:solidFill>
+                <a:latin typeface="Courier New"/>
+              </a:defRPr>
+            </a:pPr>
+            <a:r>
+              <a:rPr sz="1200" b="0">
+                <a:solidFill>
+                  <a:srgbClr val="F8FAFC"/>
+                </a:solidFill>
+                <a:latin typeface="Courier New"/>
+              </a:rPr>
+              <a:t>print("\nverdaderos: Intercept=0.10, A=0.02, B=0.015, A:B=0.02")</a:t>
+            </a:r>
+          </a:p>
+          <a:p>
+            <a:pPr>
+              <a:defRPr sz="1200" b="0">
+                <a:solidFill>
+                  <a:srgbClr val="F8FAFC"/>
+                </a:solidFill>
+                <a:latin typeface="Courier New"/>
+              </a:defRPr>
+            </a:pPr>
+            <a:r>
+              <a:rPr sz="1200" b="0">
+                <a:solidFill>
+                  <a:srgbClr val="F8FAFC"/>
+                </a:solidFill>
+                <a:latin typeface="Courier New"/>
+              </a:rPr>
+              <a:t># ... (truncado)</a:t>
             </a:r>
           </a:p>
         </p:txBody>
